--- a/CarPricePrediction Final.pptx
+++ b/CarPricePrediction Final.pptx
@@ -9919,8 +9919,8 @@
         </p:nvSpPr>
         <p:spPr>
           <a:xfrm>
-            <a:off x="5440680" y="1005840"/>
-            <a:ext cx="3291840" cy="1005840"/>
+            <a:off x="502921" y="1019556"/>
+            <a:ext cx="5832138" cy="1005840"/>
           </a:xfrm>
           <a:prstGeom prst="rect">
             <a:avLst/>
@@ -10078,7 +10078,7 @@
         <p:spPr>
           <a:xfrm>
             <a:off x="1005840" y="1453896"/>
-            <a:ext cx="5006339" cy="512064"/>
+            <a:ext cx="5329219" cy="512064"/>
           </a:xfrm>
           <a:prstGeom prst="rect">
             <a:avLst/>
@@ -10123,7 +10123,7 @@
         <p:spPr>
           <a:xfrm>
             <a:off x="502921" y="2176272"/>
-            <a:ext cx="3291840" cy="1005840"/>
+            <a:ext cx="5832138" cy="1005840"/>
           </a:xfrm>
           <a:prstGeom prst="rect">
             <a:avLst/>
@@ -10326,7 +10326,7 @@
         <p:spPr>
           <a:xfrm>
             <a:off x="502921" y="3319272"/>
-            <a:ext cx="3291840" cy="1005840"/>
+            <a:ext cx="5832138" cy="1005840"/>
           </a:xfrm>
           <a:prstGeom prst="rect">
             <a:avLst/>
